--- a/weekly_presentations/week07_fast_computation_milestone2.pptx
+++ b/weekly_presentations/week07_fast_computation_milestone2.pptx
@@ -10,6 +10,10 @@
     <p:sldId id="258" r:id="rId9"/>
     <p:sldId id="259" r:id="rId10"/>
     <p:sldId id="260" r:id="rId11"/>
+    <p:sldId id="261" r:id="rId12"/>
+    <p:sldId id="262" r:id="rId13"/>
+    <p:sldId id="263" r:id="rId14"/>
+    <p:sldId id="264" r:id="rId15"/>
   </p:sldIdLst>
   <p:sldSz cx="12191695" cy="6858000" type="screen4x3"/>
   <p:notesSz cx="6858000" cy="9144000"/>
@@ -3182,18 +3186,18 @@
           <a:lstStyle/>
           <a:p>
             <a:r>
-              <a:rPr sz="3200" b="1" i="0">
+              <a:rPr sz="3000" b="1" i="0">
                 <a:solidFill>
                   <a:srgbClr val="990000"/>
                 </a:solidFill>
                 <a:latin typeface="Arial"/>
               </a:rPr>
-              <a:t>Week 7 — Fast Computation of Prices, Greeks, Implied Vol, and Surfaces</a:t>
-            </a:r>
-          </a:p>
-          <a:p>
-            <a:r>
-              <a:rPr sz="1900" b="0" i="1">
+              <a:t>Week 7 — Fast Computation: Prices, Greeks, Implied Vol, Surfaces</a:t>
+            </a:r>
+          </a:p>
+          <a:p>
+            <a:r>
+              <a:rPr sz="1800" b="0" i="1">
                 <a:solidFill>
                   <a:srgbClr val="6D6D6D"/>
                 </a:solidFill>
@@ -3235,49 +3239,6 @@
               </a:rPr>
               <a:t>Optimal Market Making for Cryptocurrency Options  ·  NC State University</a:t>
             </a:r>
-          </a:p>
-        </p:txBody>
-      </p:sp>
-      <p:sp>
-        <p:nvSpPr>
-          <p:cNvPr id="6" name="Rectangle 5"/>
-          <p:cNvSpPr/>
-          <p:nvPr/>
-        </p:nvSpPr>
-        <p:spPr>
-          <a:xfrm>
-            <a:off x="548640" y="5394960"/>
-            <a:ext cx="3657600" cy="38100"/>
-          </a:xfrm>
-          <a:prstGeom prst="rect">
-            <a:avLst/>
-          </a:prstGeom>
-          <a:solidFill>
-            <a:srgbClr val="CC0000"/>
-          </a:solidFill>
-          <a:ln>
-            <a:noFill/>
-          </a:ln>
-        </p:spPr>
-        <p:style>
-          <a:lnRef idx="1">
-            <a:schemeClr val="accent1"/>
-          </a:lnRef>
-          <a:fillRef idx="3">
-            <a:schemeClr val="accent1"/>
-          </a:fillRef>
-          <a:effectRef idx="2">
-            <a:schemeClr val="accent1"/>
-          </a:effectRef>
-          <a:fontRef idx="minor">
-            <a:schemeClr val="lt1"/>
-          </a:fontRef>
-        </p:style>
-        <p:txBody>
-          <a:bodyPr rtlCol="0" anchor="ctr"/>
-          <a:lstStyle/>
-          <a:p>
-            <a:pPr algn="ctr"/>
           </a:p>
         </p:txBody>
       </p:sp>
@@ -3340,13 +3301,13 @@
           <a:noFill/>
         </p:spPr>
         <p:txBody>
-          <a:bodyPr wrap="none">
+          <a:bodyPr wrap="square">
             <a:spAutoFit/>
           </a:bodyPr>
           <a:lstStyle/>
           <a:p>
             <a:r>
-              <a:rPr sz="2600" b="1" i="0">
+              <a:rPr sz="2400" b="1" i="0">
                 <a:solidFill>
                   <a:srgbClr val="990000"/>
                 </a:solidFill>
@@ -3365,8 +3326,8 @@
         </p:nvSpPr>
         <p:spPr>
           <a:xfrm>
-            <a:off x="457200" y="1234440"/>
-            <a:ext cx="11247120" cy="31750"/>
+            <a:off x="457200" y="1371600"/>
+            <a:ext cx="11247120" cy="27940"/>
           </a:xfrm>
           <a:prstGeom prst="rect">
             <a:avLst/>
@@ -3408,7 +3369,7 @@
         </p:nvSpPr>
         <p:spPr>
           <a:xfrm>
-            <a:off x="640080" y="1554480"/>
+            <a:off x="640080" y="1600200"/>
             <a:ext cx="10972800" cy="4937760"/>
           </a:xfrm>
           <a:prstGeom prst="rect">
@@ -3424,49 +3385,49 @@
           <a:p>
             <a:pPr>
               <a:spcAft>
-                <a:spcPts val="1000"/>
+                <a:spcPts val="800"/>
               </a:spcAft>
             </a:pPr>
             <a:r>
-              <a:rPr sz="1900" b="0" i="0">
+              <a:rPr sz="1700" b="0" i="0">
                 <a:solidFill>
                   <a:srgbClr val="1A1A1A"/>
                 </a:solidFill>
                 <a:latin typeface="Arial"/>
               </a:rPr>
-              <a:t>•  Implement characteristic-function pricers in C++ (COS, Carr-Madan)</a:t>
+              <a:t>•  Implement COS / Carr-Madan pricers and robust implied-vol in C++</a:t>
             </a:r>
           </a:p>
           <a:p>
             <a:pPr>
               <a:spcAft>
-                <a:spcPts val="1000"/>
+                <a:spcPts val="800"/>
               </a:spcAft>
             </a:pPr>
             <a:r>
-              <a:rPr sz="1900" b="0" i="0">
-                <a:solidFill>
-                  <a:srgbClr val="1A1A1A"/>
-                </a:solidFill>
-                <a:latin typeface="Arial"/>
-              </a:rPr>
-              <a:t>•  Implement robust implied-vol inversion and surface revaluation</a:t>
-            </a:r>
-          </a:p>
-          <a:p>
-            <a:pPr>
-              <a:spcAft>
-                <a:spcPts val="1000"/>
-              </a:spcAft>
-            </a:pPr>
-            <a:r>
-              <a:rPr sz="1900" b="0" i="0">
+              <a:rPr sz="1700" b="0" i="0">
                 <a:solidFill>
                   <a:srgbClr val="1A1A1A"/>
                 </a:solidFill>
                 <a:latin typeface="Arial"/>
               </a:rPr>
               <a:t>•  Expose the C++ kernels to Python with pybind11</a:t>
+            </a:r>
+          </a:p>
+          <a:p>
+            <a:pPr>
+              <a:spcAft>
+                <a:spcPts val="800"/>
+              </a:spcAft>
+            </a:pPr>
+            <a:r>
+              <a:rPr sz="1700" b="0" i="0">
+                <a:solidFill>
+                  <a:srgbClr val="1A1A1A"/>
+                </a:solidFill>
+                <a:latin typeface="Arial"/>
+              </a:rPr>
+              <a:t>•  Validate Greeks against PyTorch autograd; hit the 5 ms budget</a:t>
             </a:r>
           </a:p>
         </p:txBody>
@@ -3530,19 +3491,19 @@
           <a:noFill/>
         </p:spPr>
         <p:txBody>
-          <a:bodyPr wrap="none">
+          <a:bodyPr wrap="square">
             <a:spAutoFit/>
           </a:bodyPr>
           <a:lstStyle/>
           <a:p>
             <a:r>
-              <a:rPr sz="2600" b="1" i="0">
+              <a:rPr sz="2400" b="1" i="0">
                 <a:solidFill>
                   <a:srgbClr val="990000"/>
                 </a:solidFill>
                 <a:latin typeface="Arial"/>
               </a:rPr>
-              <a:t>Lecture 1: CF Pricing &amp; Implied Vol in C++</a:t>
+              <a:t>Lecture 1: CF Pricing &amp; Implied Vol</a:t>
             </a:r>
           </a:p>
         </p:txBody>
@@ -3555,8 +3516,8 @@
         </p:nvSpPr>
         <p:spPr>
           <a:xfrm>
-            <a:off x="457200" y="1234440"/>
-            <a:ext cx="11247120" cy="31750"/>
+            <a:off x="457200" y="1371600"/>
+            <a:ext cx="11247120" cy="27940"/>
           </a:xfrm>
           <a:prstGeom prst="rect">
             <a:avLst/>
@@ -3598,7 +3559,7 @@
         </p:nvSpPr>
         <p:spPr>
           <a:xfrm>
-            <a:off x="640080" y="1554480"/>
+            <a:off x="640080" y="1600200"/>
             <a:ext cx="10972800" cy="4937760"/>
           </a:xfrm>
           <a:prstGeom prst="rect">
@@ -3614,65 +3575,49 @@
           <a:p>
             <a:pPr>
               <a:spcAft>
-                <a:spcPts val="1000"/>
+                <a:spcPts val="800"/>
               </a:spcAft>
             </a:pPr>
             <a:r>
-              <a:rPr sz="1900" b="0" i="0">
+              <a:rPr sz="1700" b="0" i="0">
                 <a:solidFill>
                   <a:srgbClr val="1A1A1A"/>
                 </a:solidFill>
                 <a:latin typeface="Arial"/>
               </a:rPr>
-              <a:t>•  Characteristic functions under Black-Scholes and Heston</a:t>
+              <a:t>•  Characteristic functions: Black-Scholes and Heston</a:t>
             </a:r>
           </a:p>
           <a:p>
             <a:pPr>
               <a:spcAft>
-                <a:spcPts val="1000"/>
+                <a:spcPts val="800"/>
               </a:spcAft>
             </a:pPr>
             <a:r>
-              <a:rPr sz="1900" b="0" i="0">
+              <a:rPr sz="1700" b="0" i="0">
                 <a:solidFill>
                   <a:srgbClr val="1A1A1A"/>
                 </a:solidFill>
                 <a:latin typeface="Arial"/>
               </a:rPr>
-              <a:t>•  The Fang-Oosterlee COS method (the workhorse)</a:t>
+              <a:t>•  Fang-Oosterlee COS method (the workhorse)</a:t>
             </a:r>
           </a:p>
           <a:p>
             <a:pPr>
               <a:spcAft>
-                <a:spcPts val="1000"/>
+                <a:spcPts val="800"/>
               </a:spcAft>
             </a:pPr>
             <a:r>
-              <a:rPr sz="1900" b="0" i="0">
+              <a:rPr sz="1700" b="0" i="0">
                 <a:solidFill>
                   <a:srgbClr val="1A1A1A"/>
                 </a:solidFill>
                 <a:latin typeface="Arial"/>
               </a:rPr>
-              <a:t>•  Robust implied-vol inversion: good guess + safeguarded Newton</a:t>
-            </a:r>
-          </a:p>
-          <a:p>
-            <a:pPr>
-              <a:spcAft>
-                <a:spcPts val="1000"/>
-              </a:spcAft>
-            </a:pPr>
-            <a:r>
-              <a:rPr sz="1900" b="0" i="0">
-                <a:solidFill>
-                  <a:srgbClr val="1A1A1A"/>
-                </a:solidFill>
-                <a:latin typeface="Arial"/>
-              </a:rPr>
-              <a:t>•  Vectorizing a whole surface</a:t>
+              <a:t>•  Robust implied-vol inversion (good guess + safeguarded Newton)</a:t>
             </a:r>
           </a:p>
         </p:txBody>
@@ -3736,19 +3681,19 @@
           <a:noFill/>
         </p:spPr>
         <p:txBody>
-          <a:bodyPr wrap="none">
+          <a:bodyPr wrap="square">
             <a:spAutoFit/>
           </a:bodyPr>
           <a:lstStyle/>
           <a:p>
             <a:r>
-              <a:rPr sz="2600" b="1" i="0">
+              <a:rPr sz="2400" b="1" i="0">
                 <a:solidFill>
                   <a:srgbClr val="990000"/>
                 </a:solidFill>
                 <a:latin typeface="Arial"/>
               </a:rPr>
-              <a:t>Lecture 2: Binding C++ to Python with pybind11</a:t>
+              <a:t>Lecture 2: Binding C++ with pybind11</a:t>
             </a:r>
           </a:p>
         </p:txBody>
@@ -3761,8 +3706,8 @@
         </p:nvSpPr>
         <p:spPr>
           <a:xfrm>
-            <a:off x="457200" y="1234440"/>
-            <a:ext cx="11247120" cy="31750"/>
+            <a:off x="457200" y="1371600"/>
+            <a:ext cx="11247120" cy="27940"/>
           </a:xfrm>
           <a:prstGeom prst="rect">
             <a:avLst/>
@@ -3804,7 +3749,7 @@
         </p:nvSpPr>
         <p:spPr>
           <a:xfrm>
-            <a:off x="640080" y="1554480"/>
+            <a:off x="640080" y="1600200"/>
             <a:ext cx="10972800" cy="4937760"/>
           </a:xfrm>
           <a:prstGeom prst="rect">
@@ -3820,59 +3765,59 @@
           <a:p>
             <a:pPr>
               <a:spcAft>
-                <a:spcPts val="1000"/>
+                <a:spcPts val="800"/>
               </a:spcAft>
             </a:pPr>
             <a:r>
-              <a:rPr sz="1900" b="0" i="0">
+              <a:rPr sz="1700" b="0" i="0">
                 <a:solidFill>
                   <a:srgbClr val="1A1A1A"/>
                 </a:solidFill>
                 <a:latin typeface="Arial"/>
               </a:rPr>
-              <a:t>•  How a pybind11 module is structured and built with CMake</a:t>
+              <a:t>•  Structure a pybind11 module; build with CMake</a:t>
             </a:r>
           </a:p>
           <a:p>
             <a:pPr>
               <a:spcAft>
-                <a:spcPts val="1000"/>
+                <a:spcPts val="800"/>
               </a:spcAft>
             </a:pPr>
             <a:r>
-              <a:rPr sz="1900" b="0" i="0">
+              <a:rPr sz="1700" b="0" i="0">
                 <a:solidFill>
                   <a:srgbClr val="1A1A1A"/>
                 </a:solidFill>
                 <a:latin typeface="Arial"/>
               </a:rPr>
-              <a:t>•  Passing NumPy/PyTorch tensors with no copy (buffer protocol)</a:t>
+              <a:t>•  Pass NumPy/PyTorch tensors with no copy (buffer protocol)</a:t>
             </a:r>
           </a:p>
           <a:p>
             <a:pPr>
               <a:spcAft>
-                <a:spcPts val="1000"/>
+                <a:spcPts val="800"/>
               </a:spcAft>
             </a:pPr>
             <a:r>
-              <a:rPr sz="1900" b="0" i="0">
+              <a:rPr sz="1700" b="0" i="0">
                 <a:solidFill>
                   <a:srgbClr val="1A1A1A"/>
                 </a:solidFill>
                 <a:latin typeface="Arial"/>
               </a:rPr>
-              <a:t>•  Releasing the GIL around the C++ hot loop</a:t>
+              <a:t>•  Release the GIL around the C++ hot loop</a:t>
             </a:r>
           </a:p>
           <a:p>
             <a:pPr>
               <a:spcAft>
-                <a:spcPts val="1000"/>
+                <a:spcPts val="800"/>
               </a:spcAft>
             </a:pPr>
             <a:r>
-              <a:rPr sz="1900" b="0" i="0">
+              <a:rPr sz="1700" b="0" i="0">
                 <a:solidFill>
                   <a:srgbClr val="1A1A1A"/>
                 </a:solidFill>
@@ -3917,7 +3862,7 @@
         </p:blipFill>
         <p:spPr>
           <a:xfrm>
-            <a:off x="9784080" y="274320"/>
+            <a:off x="9784080" y="228600"/>
             <a:ext cx="2011680" cy="316653"/>
           </a:xfrm>
           <a:prstGeom prst="rect">
@@ -3933,8 +3878,8 @@
         </p:nvSpPr>
         <p:spPr>
           <a:xfrm>
-            <a:off x="457200" y="457200"/>
-            <a:ext cx="8961120" cy="822960"/>
+            <a:off x="457200" y="411480"/>
+            <a:ext cx="8961120" cy="731520"/>
           </a:xfrm>
           <a:prstGeom prst="rect">
             <a:avLst/>
@@ -3948,13 +3893,124 @@
           <a:lstStyle/>
           <a:p>
             <a:r>
-              <a:rPr sz="2600" b="1" i="0">
+              <a:rPr sz="2200" b="1" i="0">
                 <a:solidFill>
                   <a:srgbClr val="990000"/>
                 </a:solidFill>
                 <a:latin typeface="Arial"/>
               </a:rPr>
-              <a:t>Milestone 2 Deliverable</a:t>
+              <a:t>Illustration</a:t>
+            </a:r>
+          </a:p>
+        </p:txBody>
+      </p:sp>
+      <p:pic>
+        <p:nvPicPr>
+          <p:cNvPr id="4" name="Picture 3" descr="week07.png"/>
+          <p:cNvPicPr>
+            <a:picLocks noChangeAspect="1"/>
+          </p:cNvPicPr>
+          <p:nvPr/>
+        </p:nvPicPr>
+        <p:blipFill>
+          <a:blip r:embed="rId3"/>
+          <a:stretch>
+            <a:fillRect/>
+          </a:stretch>
+        </p:blipFill>
+        <p:spPr>
+          <a:xfrm>
+            <a:off x="1280160" y="1371600"/>
+            <a:ext cx="9601200" cy="5233054"/>
+          </a:xfrm>
+          <a:prstGeom prst="rect">
+            <a:avLst/>
+          </a:prstGeom>
+        </p:spPr>
+      </p:pic>
+    </p:spTree>
+  </p:cSld>
+  <p:clrMapOvr>
+    <a:masterClrMapping/>
+  </p:clrMapOvr>
+</p:sld>
+</file>
+
+<file path=ppt/slides/slide6.xml><?xml version="1.0" encoding="utf-8"?>
+<p:sld xmlns:a="http://schemas.openxmlformats.org/drawingml/2006/main" xmlns:p="http://schemas.openxmlformats.org/presentationml/2006/main" xmlns:r="http://schemas.openxmlformats.org/officeDocument/2006/relationships">
+  <p:cSld>
+    <p:spTree>
+      <p:nvGrpSpPr>
+        <p:cNvPr id="1" name=""/>
+        <p:cNvGrpSpPr/>
+        <p:nvPr/>
+      </p:nvGrpSpPr>
+      <p:grpSpPr/>
+      <p:pic>
+        <p:nvPicPr>
+          <p:cNvPr id="2" name="Picture 1" descr="ncsu_logo.png"/>
+          <p:cNvPicPr>
+            <a:picLocks noChangeAspect="1"/>
+          </p:cNvPicPr>
+          <p:nvPr/>
+        </p:nvPicPr>
+        <p:blipFill>
+          <a:blip r:embed="rId2"/>
+          <a:stretch>
+            <a:fillRect/>
+          </a:stretch>
+        </p:blipFill>
+        <p:spPr>
+          <a:xfrm>
+            <a:off x="9784080" y="274320"/>
+            <a:ext cx="2011680" cy="316653"/>
+          </a:xfrm>
+          <a:prstGeom prst="rect">
+            <a:avLst/>
+          </a:prstGeom>
+        </p:spPr>
+      </p:pic>
+      <p:sp>
+        <p:nvSpPr>
+          <p:cNvPr id="3" name="TextBox 2"/>
+          <p:cNvSpPr txBox="1"/>
+          <p:nvPr/>
+        </p:nvSpPr>
+        <p:spPr>
+          <a:xfrm>
+            <a:off x="457200" y="457200"/>
+            <a:ext cx="8961120" cy="822960"/>
+          </a:xfrm>
+          <a:prstGeom prst="rect">
+            <a:avLst/>
+          </a:prstGeom>
+          <a:noFill/>
+        </p:spPr>
+        <p:txBody>
+          <a:bodyPr wrap="square">
+            <a:spAutoFit/>
+          </a:bodyPr>
+          <a:lstStyle/>
+          <a:p>
+            <a:r>
+              <a:rPr sz="2400" b="1" i="0">
+                <a:solidFill>
+                  <a:srgbClr val="990000"/>
+                </a:solidFill>
+                <a:latin typeface="Arial"/>
+              </a:rPr>
+              <a:t>Key Equations &amp; Why We Choose Them</a:t>
+            </a:r>
+          </a:p>
+          <a:p>
+            <a:r>
+              <a:rPr sz="1300" b="0" i="1">
+                <a:solidFill>
+                  <a:srgbClr val="6D6D6D"/>
+                </a:solidFill>
+                <a:latin typeface="Arial"/>
+              </a:rPr>
+              <a:t>Full derivations in the PDF deck</a:t>
             </a:r>
           </a:p>
         </p:txBody>
@@ -3967,8 +4023,8 @@
         </p:nvSpPr>
         <p:spPr>
           <a:xfrm>
-            <a:off x="457200" y="1234440"/>
-            <a:ext cx="11247120" cy="31750"/>
+            <a:off x="457200" y="1371600"/>
+            <a:ext cx="11247120" cy="27940"/>
           </a:xfrm>
           <a:prstGeom prst="rect">
             <a:avLst/>
@@ -4010,7 +4066,7 @@
         </p:nvSpPr>
         <p:spPr>
           <a:xfrm>
-            <a:off x="640080" y="1554480"/>
+            <a:off x="640080" y="1600200"/>
             <a:ext cx="10972800" cy="4937760"/>
           </a:xfrm>
           <a:prstGeom prst="rect">
@@ -4026,65 +4082,822 @@
           <a:p>
             <a:pPr>
               <a:spcAft>
-                <a:spcPts val="1000"/>
+                <a:spcPts val="500"/>
               </a:spcAft>
             </a:pPr>
             <a:r>
-              <a:rPr sz="1900" b="0" i="0">
+              <a:rPr sz="1200" b="0" i="0">
+                <a:solidFill>
+                  <a:srgbClr val="1A1A1A"/>
+                </a:solidFill>
+                <a:latin typeface="Consolas"/>
+              </a:rPr>
+              <a:t>    C(K)=e^{-rT}\,\tfrac{1}{\pi}\!\int_0^\infty \mathrm{Re}\!\big[e^{-iu\ln K}\hat{\phi}(u)\big]\,du</a:t>
+            </a:r>
+          </a:p>
+          <a:p>
+            <a:pPr>
+              <a:spcAft>
+                <a:spcPts val="500"/>
+              </a:spcAft>
+            </a:pPr>
+            <a:r>
+              <a:rPr sz="1200" b="0" i="0">
                 <a:solidFill>
                   <a:srgbClr val="1A1A1A"/>
                 </a:solidFill>
                 <a:latin typeface="Arial"/>
               </a:rPr>
-              <a:t>•  C++ pricing/implied-vol/Greeks library, imported via pybind11</a:t>
+              <a:t>•  why: Once we leave Black-Scholes (e.g. Heston), there is no closed-form price, but the characteristic function $\phi$ IS known. Pricing becomes a single Fourier integral -- this is why CF methods exist and why they are fast.</a:t>
             </a:r>
           </a:p>
           <a:p>
             <a:pPr>
               <a:spcAft>
-                <a:spcPts val="1000"/>
+                <a:spcPts val="500"/>
               </a:spcAft>
             </a:pPr>
             <a:r>
-              <a:rPr sz="1900" b="0" i="0">
+              <a:rPr sz="1200" b="0" i="0">
+                <a:solidFill>
+                  <a:srgbClr val="1A1A1A"/>
+                </a:solidFill>
+                <a:latin typeface="Consolas"/>
+              </a:rPr>
+              <a:t>    C \approx \sum_{n=0}^{N-1}{}' \mathrm{Re}\!\Big[\phi\!\big(\tfrac{n\pi}{b-a}\big)e^{-i n\pi\frac{a}{b-a}}\Big]V_n</a:t>
+            </a:r>
+          </a:p>
+          <a:p>
+            <a:pPr>
+              <a:spcAft>
+                <a:spcPts val="500"/>
+              </a:spcAft>
+            </a:pPr>
+            <a:r>
+              <a:rPr sz="1200" b="0" i="0">
                 <a:solidFill>
                   <a:srgbClr val="1A1A1A"/>
                 </a:solidFill>
                 <a:latin typeface="Arial"/>
               </a:rPr>
-              <a:t>•  Full BTC surface (300-500 contracts) revalued under 5 ms</a:t>
-            </a:r>
-          </a:p>
+              <a:t>•  why: The Fang-Oosterlee COS method replaces the integral with a cosine series that converges geometrically for smooth densities. We truncate $[a,b]$ from the cumulants, not by guessing -- that is what makes it reach $10^{-4}$ accuracy in microseconds.</a:t>
+            </a:r>
+          </a:p>
+        </p:txBody>
+      </p:sp>
+    </p:spTree>
+  </p:cSld>
+  <p:clrMapOvr>
+    <a:masterClrMapping/>
+  </p:clrMapOvr>
+</p:sld>
+</file>
+
+<file path=ppt/slides/slide7.xml><?xml version="1.0" encoding="utf-8"?>
+<p:sld xmlns:a="http://schemas.openxmlformats.org/drawingml/2006/main" xmlns:p="http://schemas.openxmlformats.org/presentationml/2006/main" xmlns:r="http://schemas.openxmlformats.org/officeDocument/2006/relationships">
+  <p:cSld>
+    <p:spTree>
+      <p:nvGrpSpPr>
+        <p:cNvPr id="1" name=""/>
+        <p:cNvGrpSpPr/>
+        <p:nvPr/>
+      </p:nvGrpSpPr>
+      <p:grpSpPr/>
+      <p:pic>
+        <p:nvPicPr>
+          <p:cNvPr id="2" name="Picture 1" descr="ncsu_logo.png"/>
+          <p:cNvPicPr>
+            <a:picLocks noChangeAspect="1"/>
+          </p:cNvPicPr>
+          <p:nvPr/>
+        </p:nvPicPr>
+        <p:blipFill>
+          <a:blip r:embed="rId2"/>
+          <a:stretch>
+            <a:fillRect/>
+          </a:stretch>
+        </p:blipFill>
+        <p:spPr>
+          <a:xfrm>
+            <a:off x="9784080" y="274320"/>
+            <a:ext cx="2011680" cy="316653"/>
+          </a:xfrm>
+          <a:prstGeom prst="rect">
+            <a:avLst/>
+          </a:prstGeom>
+        </p:spPr>
+      </p:pic>
+      <p:sp>
+        <p:nvSpPr>
+          <p:cNvPr id="3" name="TextBox 2"/>
+          <p:cNvSpPr txBox="1"/>
+          <p:nvPr/>
+        </p:nvSpPr>
+        <p:spPr>
+          <a:xfrm>
+            <a:off x="457200" y="457200"/>
+            <a:ext cx="8961120" cy="822960"/>
+          </a:xfrm>
+          <a:prstGeom prst="rect">
+            <a:avLst/>
+          </a:prstGeom>
+          <a:noFill/>
+        </p:spPr>
+        <p:txBody>
+          <a:bodyPr wrap="square">
+            <a:spAutoFit/>
+          </a:bodyPr>
+          <a:lstStyle/>
+          <a:p>
+            <a:r>
+              <a:rPr sz="2400" b="1" i="0">
+                <a:solidFill>
+                  <a:srgbClr val="990000"/>
+                </a:solidFill>
+                <a:latin typeface="Arial"/>
+              </a:rPr>
+              <a:t>Getting the Data from Coincall</a:t>
+            </a:r>
+          </a:p>
+          <a:p>
+            <a:r>
+              <a:rPr sz="1300" b="0" i="1">
+                <a:solidFill>
+                  <a:srgbClr val="6D6D6D"/>
+                </a:solidFill>
+                <a:latin typeface="Arial"/>
+              </a:rPr>
+              <a:t>Cross-check exact paths at https://docs.coincall.com/</a:t>
+            </a:r>
+          </a:p>
+        </p:txBody>
+      </p:sp>
+      <p:sp>
+        <p:nvSpPr>
+          <p:cNvPr id="4" name="Rectangle 3"/>
+          <p:cNvSpPr/>
+          <p:nvPr/>
+        </p:nvSpPr>
+        <p:spPr>
+          <a:xfrm>
+            <a:off x="457200" y="1371600"/>
+            <a:ext cx="11247120" cy="27940"/>
+          </a:xfrm>
+          <a:prstGeom prst="rect">
+            <a:avLst/>
+          </a:prstGeom>
+          <a:solidFill>
+            <a:srgbClr val="CC0000"/>
+          </a:solidFill>
+          <a:ln>
+            <a:noFill/>
+          </a:ln>
+        </p:spPr>
+        <p:style>
+          <a:lnRef idx="1">
+            <a:schemeClr val="accent1"/>
+          </a:lnRef>
+          <a:fillRef idx="3">
+            <a:schemeClr val="accent1"/>
+          </a:fillRef>
+          <a:effectRef idx="2">
+            <a:schemeClr val="accent1"/>
+          </a:effectRef>
+          <a:fontRef idx="minor">
+            <a:schemeClr val="lt1"/>
+          </a:fontRef>
+        </p:style>
+        <p:txBody>
+          <a:bodyPr rtlCol="0" anchor="ctr"/>
+          <a:lstStyle/>
+          <a:p>
+            <a:pPr algn="ctr"/>
+          </a:p>
+        </p:txBody>
+      </p:sp>
+      <p:sp>
+        <p:nvSpPr>
+          <p:cNvPr id="5" name="TextBox 4"/>
+          <p:cNvSpPr txBox="1"/>
+          <p:nvPr/>
+        </p:nvSpPr>
+        <p:spPr>
+          <a:xfrm>
+            <a:off x="640080" y="1600200"/>
+            <a:ext cx="10972800" cy="4937760"/>
+          </a:xfrm>
+          <a:prstGeom prst="rect">
+            <a:avLst/>
+          </a:prstGeom>
+          <a:noFill/>
+        </p:spPr>
+        <p:txBody>
+          <a:bodyPr wrap="square">
+            <a:spAutoFit/>
+          </a:bodyPr>
+          <a:lstStyle/>
           <a:p>
             <a:pPr>
               <a:spcAft>
-                <a:spcPts val="1000"/>
+                <a:spcPts val="500"/>
               </a:spcAft>
             </a:pPr>
             <a:r>
-              <a:rPr sz="1900" b="0" i="0">
+              <a:rPr sz="1200" b="0" i="0">
                 <a:solidFill>
                   <a:srgbClr val="1A1A1A"/>
                 </a:solidFill>
                 <a:latin typeface="Arial"/>
               </a:rPr>
-              <a:t>•  Greeks within 1e-4 of PyTorch autograd; pricing within 1e-4 of reference</a:t>
+              <a:t>•  Inputs are the calibrated surface from Week 6 plus reference prices:</a:t>
             </a:r>
           </a:p>
           <a:p>
             <a:pPr>
               <a:spcAft>
-                <a:spcPts val="1000"/>
+                <a:spcPts val="500"/>
               </a:spcAft>
             </a:pPr>
             <a:r>
-              <a:rPr sz="1900" b="0" i="0">
+              <a:rPr sz="1200" b="0" i="0">
+                <a:solidFill>
+                  <a:srgbClr val="1A1A1A"/>
+                </a:solidFill>
+                <a:latin typeface="Consolas"/>
+              </a:rPr>
+              <a:t>    coincall_btc_options_chain_snapshots_2025Q4.parquet</a:t>
+            </a:r>
+          </a:p>
+          <a:p>
+            <a:pPr>
+              <a:spcAft>
+                <a:spcPts val="500"/>
+              </a:spcAft>
+            </a:pPr>
+            <a:r>
+              <a:rPr sz="1200" b="0" i="0">
+                <a:solidFill>
+                  <a:srgbClr val="1A1A1A"/>
+                </a:solidFill>
+                <a:latin typeface="Consolas"/>
+              </a:rPr>
+              <a:t>    coincall_calibrated_svi_surfaces_2025Q4.parquet (baseline)</a:t>
+            </a:r>
+          </a:p>
+          <a:p>
+            <a:pPr>
+              <a:spcAft>
+                <a:spcPts val="500"/>
+              </a:spcAft>
+            </a:pPr>
+            <a:r>
+              <a:rPr sz="1200" b="0" i="0">
+                <a:solidFill>
+                  <a:srgbClr val="1A1A1A"/>
+                </a:solidFill>
+                <a:latin typeface="Consolas"/>
+              </a:rPr>
+              <a:t>    coincall_reference_prices_2025Q4.parquet (accuracy target, 1e-4)</a:t>
+            </a:r>
+          </a:p>
+          <a:p>
+            <a:pPr>
+              <a:spcAft>
+                <a:spcPts val="500"/>
+              </a:spcAft>
+            </a:pPr>
+            <a:r>
+              <a:rPr sz="1200" b="0" i="0">
                 <a:solidFill>
                   <a:srgbClr val="1A1A1A"/>
                 </a:solidFill>
                 <a:latin typeface="Arial"/>
               </a:rPr>
-              <a:t>•  Latency reported as a distribution, plus a BINDING.md explainer</a:t>
+              <a:t>•  Live mark/IV/Greeks for spot checks: GET /open/option/detail/v1/{symbol}</a:t>
+            </a:r>
+          </a:p>
+        </p:txBody>
+      </p:sp>
+    </p:spTree>
+  </p:cSld>
+  <p:clrMapOvr>
+    <a:masterClrMapping/>
+  </p:clrMapOvr>
+</p:sld>
+</file>
+
+<file path=ppt/slides/slide8.xml><?xml version="1.0" encoding="utf-8"?>
+<p:sld xmlns:a="http://schemas.openxmlformats.org/drawingml/2006/main" xmlns:p="http://schemas.openxmlformats.org/presentationml/2006/main" xmlns:r="http://schemas.openxmlformats.org/officeDocument/2006/relationships">
+  <p:cSld>
+    <p:spTree>
+      <p:nvGrpSpPr>
+        <p:cNvPr id="1" name=""/>
+        <p:cNvGrpSpPr/>
+        <p:nvPr/>
+      </p:nvGrpSpPr>
+      <p:grpSpPr/>
+      <p:sp>
+        <p:nvSpPr>
+          <p:cNvPr id="2" name="TextBox 1"/>
+          <p:cNvSpPr txBox="1"/>
+          <p:nvPr/>
+        </p:nvSpPr>
+        <p:spPr>
+          <a:xfrm>
+            <a:off x="457200" y="365760"/>
+            <a:ext cx="11247120" cy="640080"/>
+          </a:xfrm>
+          <a:prstGeom prst="rect">
+            <a:avLst/>
+          </a:prstGeom>
+          <a:noFill/>
+        </p:spPr>
+        <p:txBody>
+          <a:bodyPr wrap="none">
+            <a:spAutoFit/>
+          </a:bodyPr>
+          <a:lstStyle/>
+          <a:p>
+            <a:r>
+              <a:rPr sz="1800" b="1" i="0">
+                <a:solidFill>
+                  <a:srgbClr val="990000"/>
+                </a:solidFill>
+                <a:latin typeface="Arial"/>
+              </a:rPr>
+              <a:t>Code — fastmm pybind11 module -- C++ kernel exposed to Python</a:t>
+            </a:r>
+          </a:p>
+        </p:txBody>
+      </p:sp>
+      <p:sp>
+        <p:nvSpPr>
+          <p:cNvPr id="3" name="Rectangle 2"/>
+          <p:cNvSpPr/>
+          <p:nvPr/>
+        </p:nvSpPr>
+        <p:spPr>
+          <a:xfrm>
+            <a:off x="457200" y="1097280"/>
+            <a:ext cx="11247120" cy="5394960"/>
+          </a:xfrm>
+          <a:prstGeom prst="rect">
+            <a:avLst/>
+          </a:prstGeom>
+          <a:solidFill>
+            <a:srgbClr val="F5F5F5"/>
+          </a:solidFill>
+          <a:ln w="9525">
+            <a:solidFill>
+              <a:srgbClr val="6D6D6D"/>
+            </a:solidFill>
+          </a:ln>
+        </p:spPr>
+        <p:style>
+          <a:lnRef idx="1">
+            <a:schemeClr val="accent1"/>
+          </a:lnRef>
+          <a:fillRef idx="3">
+            <a:schemeClr val="accent1"/>
+          </a:fillRef>
+          <a:effectRef idx="2">
+            <a:schemeClr val="accent1"/>
+          </a:effectRef>
+          <a:fontRef idx="minor">
+            <a:schemeClr val="lt1"/>
+          </a:fontRef>
+        </p:style>
+        <p:txBody>
+          <a:bodyPr rtlCol="0" anchor="ctr" wrap="square" lIns="182880" tIns="91440"/>
+          <a:lstStyle/>
+          <a:p>
+            <a:pPr algn="ctr">
+              <a:spcAft>
+                <a:spcPts val="0"/>
+              </a:spcAft>
+            </a:pPr>
+            <a:r>
+              <a:rPr sz="1100" b="0" i="0">
+                <a:solidFill>
+                  <a:srgbClr val="1A1A1A"/>
+                </a:solidFill>
+                <a:latin typeface="Consolas"/>
+              </a:rPr>
+              <a:t>// fastmm.cpp  (build with CMake + pybind11; import as `fastmm`)</a:t>
+            </a:r>
+          </a:p>
+          <a:p>
+            <a:pPr>
+              <a:spcAft>
+                <a:spcPts val="0"/>
+              </a:spcAft>
+            </a:pPr>
+            <a:r>
+              <a:rPr sz="1100" b="0" i="0">
+                <a:solidFill>
+                  <a:srgbClr val="1A1A1A"/>
+                </a:solidFill>
+                <a:latin typeface="Consolas"/>
+              </a:rPr>
+              <a:t>#include &lt;pybind11/pybind11.h&gt;</a:t>
+            </a:r>
+          </a:p>
+          <a:p>
+            <a:pPr>
+              <a:spcAft>
+                <a:spcPts val="0"/>
+              </a:spcAft>
+            </a:pPr>
+            <a:r>
+              <a:rPr sz="1100" b="0" i="0">
+                <a:solidFill>
+                  <a:srgbClr val="1A1A1A"/>
+                </a:solidFill>
+                <a:latin typeface="Consolas"/>
+              </a:rPr>
+              <a:t>#include &lt;pybind11/numpy.h&gt;</a:t>
+            </a:r>
+          </a:p>
+          <a:p>
+            <a:pPr>
+              <a:spcAft>
+                <a:spcPts val="0"/>
+              </a:spcAft>
+            </a:pPr>
+            <a:r>
+              <a:rPr sz="1100" b="0" i="0">
+                <a:solidFill>
+                  <a:srgbClr val="1A1A1A"/>
+                </a:solidFill>
+                <a:latin typeface="Consolas"/>
+              </a:rPr>
+              <a:t>namespace py = pybind11;</a:t>
+            </a:r>
+          </a:p>
+          <a:p>
+            <a:pPr>
+              <a:spcAft>
+                <a:spcPts val="0"/>
+              </a:spcAft>
+            </a:pPr>
+            <a:r>
+              <a:rPr sz="1100" b="0" i="0">
+                <a:solidFill>
+                  <a:srgbClr val="1A1A1A"/>
+                </a:solidFill>
+                <a:latin typeface="Consolas"/>
+              </a:rPr>
+              <a:t> </a:t>
+            </a:r>
+          </a:p>
+          <a:p>
+            <a:pPr>
+              <a:spcAft>
+                <a:spcPts val="0"/>
+              </a:spcAft>
+            </a:pPr>
+            <a:r>
+              <a:rPr sz="1100" b="0" i="0">
+                <a:solidFill>
+                  <a:srgbClr val="1A1A1A"/>
+                </a:solidFill>
+                <a:latin typeface="Consolas"/>
+              </a:rPr>
+              <a:t>double cos_price(double S, double K, double T, double r, double sigma);  // COS pricer</a:t>
+            </a:r>
+          </a:p>
+          <a:p>
+            <a:pPr>
+              <a:spcAft>
+                <a:spcPts val="0"/>
+              </a:spcAft>
+            </a:pPr>
+            <a:r>
+              <a:rPr sz="1100" b="0" i="0">
+                <a:solidFill>
+                  <a:srgbClr val="1A1A1A"/>
+                </a:solidFill>
+                <a:latin typeface="Consolas"/>
+              </a:rPr>
+              <a:t> </a:t>
+            </a:r>
+          </a:p>
+          <a:p>
+            <a:pPr>
+              <a:spcAft>
+                <a:spcPts val="0"/>
+              </a:spcAft>
+            </a:pPr>
+            <a:r>
+              <a:rPr sz="1100" b="0" i="0">
+                <a:solidFill>
+                  <a:srgbClr val="1A1A1A"/>
+                </a:solidFill>
+                <a:latin typeface="Consolas"/>
+              </a:rPr>
+              <a:t>py::array_t&lt;double&gt; price_surface(py::array_t&lt;double&gt; K, double S,</a:t>
+            </a:r>
+          </a:p>
+          <a:p>
+            <a:pPr>
+              <a:spcAft>
+                <a:spcPts val="0"/>
+              </a:spcAft>
+            </a:pPr>
+            <a:r>
+              <a:rPr sz="1100" b="0" i="0">
+                <a:solidFill>
+                  <a:srgbClr val="1A1A1A"/>
+                </a:solidFill>
+                <a:latin typeface="Consolas"/>
+              </a:rPr>
+              <a:t>                                  double T, double r, double sigma) {</a:t>
+            </a:r>
+          </a:p>
+          <a:p>
+            <a:pPr>
+              <a:spcAft>
+                <a:spcPts val="0"/>
+              </a:spcAft>
+            </a:pPr>
+            <a:r>
+              <a:rPr sz="1100" b="0" i="0">
+                <a:solidFill>
+                  <a:srgbClr val="1A1A1A"/>
+                </a:solidFill>
+                <a:latin typeface="Consolas"/>
+              </a:rPr>
+              <a:t>    auto k = K.unchecked&lt;1&gt;(); auto out = py::array_t&lt;double&gt;(k.shape(0));</a:t>
+            </a:r>
+          </a:p>
+          <a:p>
+            <a:pPr>
+              <a:spcAft>
+                <a:spcPts val="0"/>
+              </a:spcAft>
+            </a:pPr>
+            <a:r>
+              <a:rPr sz="1100" b="0" i="0">
+                <a:solidFill>
+                  <a:srgbClr val="1A1A1A"/>
+                </a:solidFill>
+                <a:latin typeface="Consolas"/>
+              </a:rPr>
+              <a:t>    auto o = out.mutable_unchecked&lt;1&gt;();</a:t>
+            </a:r>
+          </a:p>
+          <a:p>
+            <a:pPr>
+              <a:spcAft>
+                <a:spcPts val="0"/>
+              </a:spcAft>
+            </a:pPr>
+            <a:r>
+              <a:rPr sz="1100" b="0" i="0">
+                <a:solidFill>
+                  <a:srgbClr val="1A1A1A"/>
+                </a:solidFill>
+                <a:latin typeface="Consolas"/>
+              </a:rPr>
+              <a:t>    { py::gil_scoped_release nogil;                 // release GIL for the hot loop</a:t>
+            </a:r>
+          </a:p>
+          <a:p>
+            <a:pPr>
+              <a:spcAft>
+                <a:spcPts val="0"/>
+              </a:spcAft>
+            </a:pPr>
+            <a:r>
+              <a:rPr sz="1100" b="0" i="0">
+                <a:solidFill>
+                  <a:srgbClr val="1A1A1A"/>
+                </a:solidFill>
+                <a:latin typeface="Consolas"/>
+              </a:rPr>
+              <a:t>      for (py::ssize_t i = 0; i &lt; k.shape(0); ++i)</a:t>
+            </a:r>
+          </a:p>
+          <a:p>
+            <a:pPr>
+              <a:spcAft>
+                <a:spcPts val="0"/>
+              </a:spcAft>
+            </a:pPr>
+            <a:r>
+              <a:rPr sz="1100" b="0" i="0">
+                <a:solidFill>
+                  <a:srgbClr val="1A1A1A"/>
+                </a:solidFill>
+                <a:latin typeface="Consolas"/>
+              </a:rPr>
+              <a:t>          o(i) = cos_price(S, k(i), T, r, sigma); }</a:t>
+            </a:r>
+          </a:p>
+          <a:p>
+            <a:pPr>
+              <a:spcAft>
+                <a:spcPts val="0"/>
+              </a:spcAft>
+            </a:pPr>
+            <a:r>
+              <a:rPr sz="1100" b="0" i="0">
+                <a:solidFill>
+                  <a:srgbClr val="1A1A1A"/>
+                </a:solidFill>
+                <a:latin typeface="Consolas"/>
+              </a:rPr>
+              <a:t>    return out;                                     // zero-copy back to NumPy</a:t>
+            </a:r>
+          </a:p>
+          <a:p>
+            <a:pPr>
+              <a:spcAft>
+                <a:spcPts val="0"/>
+              </a:spcAft>
+            </a:pPr>
+            <a:r>
+              <a:rPr sz="1100" b="0" i="0">
+                <a:solidFill>
+                  <a:srgbClr val="1A1A1A"/>
+                </a:solidFill>
+                <a:latin typeface="Consolas"/>
+              </a:rPr>
+              <a:t>}</a:t>
+            </a:r>
+          </a:p>
+          <a:p>
+            <a:pPr>
+              <a:spcAft>
+                <a:spcPts val="0"/>
+              </a:spcAft>
+            </a:pPr>
+            <a:r>
+              <a:rPr sz="1100" b="0" i="0">
+                <a:solidFill>
+                  <a:srgbClr val="1A1A1A"/>
+                </a:solidFill>
+                <a:latin typeface="Consolas"/>
+              </a:rPr>
+              <a:t>PYBIND11_MODULE(fastmm, m) { m.def("price_surface", &amp;price_surface); }</a:t>
+            </a:r>
+          </a:p>
+        </p:txBody>
+      </p:sp>
+    </p:spTree>
+  </p:cSld>
+  <p:clrMapOvr>
+    <a:masterClrMapping/>
+  </p:clrMapOvr>
+</p:sld>
+</file>
+
+<file path=ppt/slides/slide9.xml><?xml version="1.0" encoding="utf-8"?>
+<p:sld xmlns:a="http://schemas.openxmlformats.org/drawingml/2006/main" xmlns:p="http://schemas.openxmlformats.org/presentationml/2006/main" xmlns:r="http://schemas.openxmlformats.org/officeDocument/2006/relationships">
+  <p:cSld>
+    <p:spTree>
+      <p:nvGrpSpPr>
+        <p:cNvPr id="1" name=""/>
+        <p:cNvGrpSpPr/>
+        <p:nvPr/>
+      </p:nvGrpSpPr>
+      <p:grpSpPr/>
+      <p:pic>
+        <p:nvPicPr>
+          <p:cNvPr id="2" name="Picture 1" descr="ncsu_logo.png"/>
+          <p:cNvPicPr>
+            <a:picLocks noChangeAspect="1"/>
+          </p:cNvPicPr>
+          <p:nvPr/>
+        </p:nvPicPr>
+        <p:blipFill>
+          <a:blip r:embed="rId2"/>
+          <a:stretch>
+            <a:fillRect/>
+          </a:stretch>
+        </p:blipFill>
+        <p:spPr>
+          <a:xfrm>
+            <a:off x="9784080" y="274320"/>
+            <a:ext cx="2011680" cy="316653"/>
+          </a:xfrm>
+          <a:prstGeom prst="rect">
+            <a:avLst/>
+          </a:prstGeom>
+        </p:spPr>
+      </p:pic>
+      <p:sp>
+        <p:nvSpPr>
+          <p:cNvPr id="3" name="TextBox 2"/>
+          <p:cNvSpPr txBox="1"/>
+          <p:nvPr/>
+        </p:nvSpPr>
+        <p:spPr>
+          <a:xfrm>
+            <a:off x="457200" y="457200"/>
+            <a:ext cx="8961120" cy="822960"/>
+          </a:xfrm>
+          <a:prstGeom prst="rect">
+            <a:avLst/>
+          </a:prstGeom>
+          <a:noFill/>
+        </p:spPr>
+        <p:txBody>
+          <a:bodyPr wrap="square">
+            <a:spAutoFit/>
+          </a:bodyPr>
+          <a:lstStyle/>
+          <a:p>
+            <a:r>
+              <a:rPr sz="2400" b="1" i="0">
+                <a:solidFill>
+                  <a:srgbClr val="990000"/>
+                </a:solidFill>
+                <a:latin typeface="Arial"/>
+              </a:rPr>
+              <a:t>Reading</a:t>
+            </a:r>
+          </a:p>
+        </p:txBody>
+      </p:sp>
+      <p:sp>
+        <p:nvSpPr>
+          <p:cNvPr id="4" name="Rectangle 3"/>
+          <p:cNvSpPr/>
+          <p:nvPr/>
+        </p:nvSpPr>
+        <p:spPr>
+          <a:xfrm>
+            <a:off x="457200" y="1371600"/>
+            <a:ext cx="11247120" cy="27940"/>
+          </a:xfrm>
+          <a:prstGeom prst="rect">
+            <a:avLst/>
+          </a:prstGeom>
+          <a:solidFill>
+            <a:srgbClr val="CC0000"/>
+          </a:solidFill>
+          <a:ln>
+            <a:noFill/>
+          </a:ln>
+        </p:spPr>
+        <p:style>
+          <a:lnRef idx="1">
+            <a:schemeClr val="accent1"/>
+          </a:lnRef>
+          <a:fillRef idx="3">
+            <a:schemeClr val="accent1"/>
+          </a:fillRef>
+          <a:effectRef idx="2">
+            <a:schemeClr val="accent1"/>
+          </a:effectRef>
+          <a:fontRef idx="minor">
+            <a:schemeClr val="lt1"/>
+          </a:fontRef>
+        </p:style>
+        <p:txBody>
+          <a:bodyPr rtlCol="0" anchor="ctr"/>
+          <a:lstStyle/>
+          <a:p>
+            <a:pPr algn="ctr"/>
+          </a:p>
+        </p:txBody>
+      </p:sp>
+      <p:sp>
+        <p:nvSpPr>
+          <p:cNvPr id="5" name="TextBox 4"/>
+          <p:cNvSpPr txBox="1"/>
+          <p:nvPr/>
+        </p:nvSpPr>
+        <p:spPr>
+          <a:xfrm>
+            <a:off x="640080" y="1600200"/>
+            <a:ext cx="10972800" cy="4937760"/>
+          </a:xfrm>
+          <a:prstGeom prst="rect">
+            <a:avLst/>
+          </a:prstGeom>
+          <a:noFill/>
+        </p:spPr>
+        <p:txBody>
+          <a:bodyPr wrap="square">
+            <a:spAutoFit/>
+          </a:bodyPr>
+          <a:lstStyle/>
+          <a:p>
+            <a:pPr>
+              <a:spcAft>
+                <a:spcPts val="800"/>
+              </a:spcAft>
+            </a:pPr>
+            <a:r>
+              <a:rPr sz="1700" b="0" i="0">
+                <a:solidFill>
+                  <a:srgbClr val="1A1A1A"/>
+                </a:solidFill>
+                <a:latin typeface="Arial"/>
+              </a:rPr>
+              <a:t>•  Carr-Madan (1999); Fang-Oosterlee (2008); Jaeckel (2015); pybind11 docs</a:t>
             </a:r>
           </a:p>
         </p:txBody>
